--- a/tamr_dti_arch.pptx
+++ b/tamr_dti_arch.pptx
@@ -6161,65 +6161,6 @@
       </p:sp>
       <p:sp>
         <p:nvSpPr>
-          <p:cNvPr id="60" name="Rectangle 59"/>
-          <p:cNvSpPr/>
-          <p:nvPr/>
-        </p:nvSpPr>
-        <p:spPr>
-          <a:xfrm>
-            <a:off x="2797690" y="2888110"/>
-            <a:ext cx="936000" cy="151200"/>
-          </a:xfrm>
-          <a:prstGeom prst="rect">
-            <a:avLst/>
-          </a:prstGeom>
-          <a:noFill/>
-          <a:ln>
-            <a:noFill/>
-          </a:ln>
-          <a:effectLst>
-            <a:reflection stA="0" endPos="65000" dist="50800" dir="5400000" sy="-100000" algn="bl" rotWithShape="0"/>
-          </a:effectLst>
-        </p:spPr>
-        <p:style>
-          <a:lnRef idx="1">
-            <a:schemeClr val="accent1"/>
-          </a:lnRef>
-          <a:fillRef idx="3">
-            <a:schemeClr val="accent1"/>
-          </a:fillRef>
-          <a:effectRef idx="2">
-            <a:schemeClr val="accent1"/>
-          </a:effectRef>
-          <a:fontRef idx="minor">
-            <a:schemeClr val="lt1"/>
-          </a:fontRef>
-        </p:style>
-        <p:txBody>
-          <a:bodyPr wrap="square" lIns="28800" tIns="14400" rIns="28800" bIns="14400" rtlCol="0" anchor="ctr"/>
-          <a:lstStyle/>
-          <a:p>
-            <a:pPr algn="l"/>
-            <a:r>
-              <a:rPr sz="900" b="1">
-                <a:solidFill>
-                  <a:srgbClr val="B06816"/>
-                </a:solidFill>
-                <a:latin typeface="Arial" panose="020B0604020202090204"/>
-              </a:rPr>
-              <a:t>α_k</a:t>
-            </a:r>
-            <a:endParaRPr sz="900" b="1">
-              <a:solidFill>
-                <a:srgbClr val="B06816"/>
-              </a:solidFill>
-              <a:latin typeface="Arial" panose="020B0604020202090204"/>
-            </a:endParaRPr>
-          </a:p>
-        </p:txBody>
-      </p:sp>
-      <p:sp>
-        <p:nvSpPr>
           <p:cNvPr id="61" name="Rectangle 60"/>
           <p:cNvSpPr/>
           <p:nvPr/>
@@ -6272,65 +6213,6 @@
       </p:sp>
       <p:sp>
         <p:nvSpPr>
-          <p:cNvPr id="62" name="Rectangle 61"/>
-          <p:cNvSpPr/>
-          <p:nvPr/>
-        </p:nvSpPr>
-        <p:spPr>
-          <a:xfrm>
-            <a:off x="3064450" y="3101549"/>
-            <a:ext cx="342000" cy="158400"/>
-          </a:xfrm>
-          <a:prstGeom prst="rect">
-            <a:avLst/>
-          </a:prstGeom>
-          <a:noFill/>
-          <a:ln>
-            <a:noFill/>
-          </a:ln>
-          <a:effectLst>
-            <a:reflection stA="0" endPos="65000" dist="50800" dir="5400000" sy="-100000" algn="bl" rotWithShape="0"/>
-          </a:effectLst>
-        </p:spPr>
-        <p:style>
-          <a:lnRef idx="1">
-            <a:schemeClr val="accent1"/>
-          </a:lnRef>
-          <a:fillRef idx="3">
-            <a:schemeClr val="accent1"/>
-          </a:fillRef>
-          <a:effectRef idx="2">
-            <a:schemeClr val="accent1"/>
-          </a:effectRef>
-          <a:fontRef idx="minor">
-            <a:schemeClr val="lt1"/>
-          </a:fontRef>
-        </p:style>
-        <p:txBody>
-          <a:bodyPr wrap="square" lIns="28800" tIns="14400" rIns="28800" bIns="14400" rtlCol="0" anchor="ctr"/>
-          <a:lstStyle/>
-          <a:p>
-            <a:pPr algn="l"/>
-            <a:r>
-              <a:rPr sz="850" b="0">
-                <a:solidFill>
-                  <a:srgbClr val="282828"/>
-                </a:solidFill>
-                <a:latin typeface="Arial" panose="020B0604020202090204"/>
-              </a:rPr>
-              <a:t>0.23</a:t>
-            </a:r>
-            <a:endParaRPr sz="850" b="0">
-              <a:solidFill>
-                <a:srgbClr val="282828"/>
-              </a:solidFill>
-              <a:latin typeface="Arial" panose="020B0604020202090204"/>
-            </a:endParaRPr>
-          </a:p>
-        </p:txBody>
-      </p:sp>
-      <p:sp>
-        <p:nvSpPr>
           <p:cNvPr id="63" name="Rectangle 62"/>
           <p:cNvSpPr/>
           <p:nvPr/>
@@ -6383,65 +6265,6 @@
       </p:sp>
       <p:sp>
         <p:nvSpPr>
-          <p:cNvPr id="64" name="Rectangle 63"/>
-          <p:cNvSpPr/>
-          <p:nvPr/>
-        </p:nvSpPr>
-        <p:spPr>
-          <a:xfrm>
-            <a:off x="3204345" y="3385740"/>
-            <a:ext cx="342000" cy="158400"/>
-          </a:xfrm>
-          <a:prstGeom prst="rect">
-            <a:avLst/>
-          </a:prstGeom>
-          <a:noFill/>
-          <a:ln>
-            <a:noFill/>
-          </a:ln>
-          <a:effectLst>
-            <a:reflection stA="0" endPos="65000" dist="50800" dir="5400000" sy="-100000" algn="bl" rotWithShape="0"/>
-          </a:effectLst>
-        </p:spPr>
-        <p:style>
-          <a:lnRef idx="1">
-            <a:schemeClr val="accent1"/>
-          </a:lnRef>
-          <a:fillRef idx="3">
-            <a:schemeClr val="accent1"/>
-          </a:fillRef>
-          <a:effectRef idx="2">
-            <a:schemeClr val="accent1"/>
-          </a:effectRef>
-          <a:fontRef idx="minor">
-            <a:schemeClr val="lt1"/>
-          </a:fontRef>
-        </p:style>
-        <p:txBody>
-          <a:bodyPr wrap="square" lIns="28800" tIns="14400" rIns="28800" bIns="14400" rtlCol="0" anchor="ctr"/>
-          <a:lstStyle/>
-          <a:p>
-            <a:pPr algn="l"/>
-            <a:r>
-              <a:rPr sz="850" b="0">
-                <a:solidFill>
-                  <a:srgbClr val="282828"/>
-                </a:solidFill>
-                <a:latin typeface="Arial" panose="020B0604020202090204"/>
-              </a:rPr>
-              <a:t>0.47</a:t>
-            </a:r>
-            <a:endParaRPr sz="850" b="0">
-              <a:solidFill>
-                <a:srgbClr val="282828"/>
-              </a:solidFill>
-              <a:latin typeface="Arial" panose="020B0604020202090204"/>
-            </a:endParaRPr>
-          </a:p>
-        </p:txBody>
-      </p:sp>
-      <p:sp>
-        <p:nvSpPr>
           <p:cNvPr id="65" name="Rectangle 64"/>
           <p:cNvSpPr/>
           <p:nvPr/>
@@ -6484,65 +6307,6 @@
           <a:p>
             <a:pPr algn="ctr"/>
             <a:endParaRPr sz="900" b="0">
-              <a:solidFill>
-                <a:srgbClr val="282828"/>
-              </a:solidFill>
-              <a:latin typeface="Arial" panose="020B0604020202090204"/>
-            </a:endParaRPr>
-          </a:p>
-        </p:txBody>
-      </p:sp>
-      <p:sp>
-        <p:nvSpPr>
-          <p:cNvPr id="66" name="Rectangle 65"/>
-          <p:cNvSpPr/>
-          <p:nvPr/>
-        </p:nvSpPr>
-        <p:spPr>
-          <a:xfrm>
-            <a:off x="2948520" y="3854714"/>
-            <a:ext cx="342000" cy="158400"/>
-          </a:xfrm>
-          <a:prstGeom prst="rect">
-            <a:avLst/>
-          </a:prstGeom>
-          <a:noFill/>
-          <a:ln>
-            <a:noFill/>
-          </a:ln>
-          <a:effectLst>
-            <a:reflection stA="0" endPos="65000" dist="50800" dir="5400000" sy="-100000" algn="bl" rotWithShape="0"/>
-          </a:effectLst>
-        </p:spPr>
-        <p:style>
-          <a:lnRef idx="1">
-            <a:schemeClr val="accent1"/>
-          </a:lnRef>
-          <a:fillRef idx="3">
-            <a:schemeClr val="accent1"/>
-          </a:fillRef>
-          <a:effectRef idx="2">
-            <a:schemeClr val="accent1"/>
-          </a:effectRef>
-          <a:fontRef idx="minor">
-            <a:schemeClr val="lt1"/>
-          </a:fontRef>
-        </p:style>
-        <p:txBody>
-          <a:bodyPr wrap="square" lIns="28800" tIns="14400" rIns="28800" bIns="14400" rtlCol="0" anchor="ctr"/>
-          <a:lstStyle/>
-          <a:p>
-            <a:pPr algn="l"/>
-            <a:r>
-              <a:rPr sz="850" b="0">
-                <a:solidFill>
-                  <a:srgbClr val="282828"/>
-                </a:solidFill>
-                <a:latin typeface="Arial" panose="020B0604020202090204"/>
-              </a:rPr>
-              <a:t>0.08</a:t>
-            </a:r>
-            <a:endParaRPr sz="850" b="0">
               <a:solidFill>
                 <a:srgbClr val="282828"/>
               </a:solidFill>
@@ -11375,7 +11139,7 @@
         </p:nvSpPr>
         <p:spPr>
           <a:xfrm>
-            <a:off x="5832475" y="6298565"/>
+            <a:off x="5832317" y="6298565"/>
             <a:ext cx="963295" cy="252730"/>
           </a:xfrm>
           <a:prstGeom prst="roundRect">
@@ -11441,7 +11205,7 @@
         </p:nvSpPr>
         <p:spPr>
           <a:xfrm>
-            <a:off x="5832158" y="5400675"/>
+            <a:off x="5832317" y="5307330"/>
             <a:ext cx="963295" cy="302260"/>
           </a:xfrm>
           <a:prstGeom prst="roundRect">
@@ -11507,8 +11271,8 @@
         </p:nvSpPr>
         <p:spPr>
           <a:xfrm>
-            <a:off x="6224270" y="5906135"/>
-            <a:ext cx="179070" cy="180340"/>
+            <a:off x="6169964" y="5803900"/>
+            <a:ext cx="288000" cy="288000"/>
           </a:xfrm>
           <a:prstGeom prst="ellipse">
             <a:avLst/>
@@ -11545,7 +11309,7 @@
           <a:p>
             <a:pPr algn="ctr"/>
             <a:r>
-              <a:rPr sz="800" b="1">
+              <a:rPr sz="1000" b="1">
                 <a:solidFill>
                   <a:srgbClr val="B06816"/>
                 </a:solidFill>
@@ -11553,7 +11317,7 @@
               </a:rPr>
               <a:t>×</a:t>
             </a:r>
-            <a:endParaRPr sz="800" b="1">
+            <a:endParaRPr sz="1000" b="1">
               <a:solidFill>
                 <a:srgbClr val="B06816"/>
               </a:solidFill>
@@ -12092,8 +11856,8 @@
         </p:nvSpPr>
         <p:spPr>
           <a:xfrm>
-            <a:off x="2797175" y="2822575"/>
-            <a:ext cx="676910" cy="1257935"/>
+            <a:off x="2797175" y="2733675"/>
+            <a:ext cx="676910" cy="1346835"/>
           </a:xfrm>
           <a:prstGeom prst="rect">
             <a:avLst/>
@@ -12309,7 +12073,7 @@
           <a:p>
             <a:pPr algn="ctr"/>
             <a:r>
-              <a:rPr lang="en-US" altLang="zh-CN" sz="800" b="1">
+              <a:rPr lang="en-US" altLang="zh-CN" sz="1000" b="1">
                 <a:solidFill>
                   <a:srgbClr val="B06816"/>
                 </a:solidFill>
@@ -12317,7 +12081,7 @@
               </a:rPr>
               <a:t>σ</a:t>
             </a:r>
-            <a:endParaRPr lang="en-US" altLang="zh-CN" sz="800" b="1">
+            <a:endParaRPr lang="en-US" altLang="zh-CN" sz="1000" b="1">
               <a:solidFill>
                 <a:srgbClr val="B06816"/>
               </a:solidFill>
@@ -12604,7 +12368,7 @@
           </a:xfrm>
           <a:prstGeom prst="bentConnector3">
             <a:avLst>
-              <a:gd name="adj1" fmla="val -770833"/>
+              <a:gd name="adj1" fmla="val -762500"/>
             </a:avLst>
           </a:prstGeom>
           <a:ln w="19050" cap="flat" cmpd="sng">
@@ -12848,8 +12612,8 @@
         </p:nvCxnSpPr>
         <p:spPr>
           <a:xfrm rot="5400000" flipV="1">
-            <a:off x="5433060" y="5205095"/>
-            <a:ext cx="123825" cy="1458595"/>
+            <a:off x="5429885" y="5208270"/>
+            <a:ext cx="75565" cy="1403985"/>
           </a:xfrm>
           <a:prstGeom prst="bentConnector2">
             <a:avLst/>
@@ -12982,8 +12746,8 @@
         </p:nvCxnSpPr>
         <p:spPr>
           <a:xfrm flipV="1">
-            <a:off x="6313805" y="5702935"/>
-            <a:ext cx="635" cy="203200"/>
+            <a:off x="6313805" y="5609590"/>
+            <a:ext cx="635" cy="194310"/>
           </a:xfrm>
           <a:prstGeom prst="straightConnector1">
             <a:avLst/>
@@ -13029,7 +12793,7 @@
         <p:spPr>
           <a:xfrm flipH="1" flipV="1">
             <a:off x="6313805" y="5092700"/>
-            <a:ext cx="635" cy="307975"/>
+            <a:ext cx="635" cy="214630"/>
           </a:xfrm>
           <a:prstGeom prst="straightConnector1">
             <a:avLst/>
@@ -13066,13 +12830,15 @@
       <p:cxnSp>
         <p:nvCxnSpPr>
           <p:cNvPr id="151" name="直接箭头连接符 150"/>
-          <p:cNvCxnSpPr/>
+          <p:cNvCxnSpPr>
+            <a:endCxn id="371" idx="4"/>
+          </p:cNvCxnSpPr>
           <p:nvPr/>
         </p:nvCxnSpPr>
         <p:spPr>
           <a:xfrm flipV="1">
             <a:off x="6313805" y="6092190"/>
-            <a:ext cx="635" cy="203200"/>
+            <a:ext cx="0" cy="203200"/>
           </a:xfrm>
           <a:prstGeom prst="straightConnector1">
             <a:avLst/>
@@ -15153,7 +14919,7 @@
         </p:nvSpPr>
         <p:spPr>
           <a:xfrm>
-            <a:off x="5259070" y="5751195"/>
+            <a:off x="5251450" y="5702935"/>
             <a:ext cx="573405" cy="245110"/>
           </a:xfrm>
           <a:prstGeom prst="rect">
@@ -15556,7 +15322,7 @@
           <a:p>
             <a:pPr algn="ctr"/>
             <a:r>
-              <a:rPr lang="en-US" altLang="zh-CN" sz="800" b="1">
+              <a:rPr lang="en-US" altLang="zh-CN" sz="1000" b="1">
                 <a:solidFill>
                   <a:schemeClr val="accent4"/>
                 </a:solidFill>
@@ -15564,7 +15330,7 @@
               </a:rPr>
               <a:t>g</a:t>
             </a:r>
-            <a:endParaRPr lang="en-US" altLang="zh-CN" sz="800" b="1">
+            <a:endParaRPr lang="en-US" altLang="zh-CN" sz="1000" b="1">
               <a:solidFill>
                 <a:schemeClr val="accent4"/>
               </a:solidFill>
@@ -15622,7 +15388,7 @@
           <a:p>
             <a:pPr algn="ctr"/>
             <a:r>
-              <a:rPr lang="en-US" altLang="zh-CN" sz="800" b="1">
+              <a:rPr lang="en-US" altLang="zh-CN" sz="1000" b="1">
                 <a:solidFill>
                   <a:srgbClr val="B06816"/>
                 </a:solidFill>
@@ -15630,7 +15396,7 @@
               </a:rPr>
               <a:t>x</a:t>
             </a:r>
-            <a:endParaRPr lang="en-US" altLang="zh-CN" sz="800" b="1">
+            <a:endParaRPr lang="en-US" altLang="zh-CN" sz="1000" b="1">
               <a:solidFill>
                 <a:srgbClr val="B06816"/>
               </a:solidFill>
@@ -15682,6 +15448,164 @@
           </a:fontRef>
         </p:style>
       </p:cxnSp>
+      <p:pic>
+        <p:nvPicPr>
+          <p:cNvPr id="33" name="334E55B0-647D-440b-865C-3EC943EB4CBC-1" descr="wpsoffice"/>
+          <p:cNvPicPr>
+            <a:picLocks noChangeAspect="1"/>
+          </p:cNvPicPr>
+          <p:nvPr/>
+        </p:nvPicPr>
+        <p:blipFill>
+          <a:blip r:embed="rId3"/>
+          <a:stretch>
+            <a:fillRect/>
+          </a:stretch>
+        </p:blipFill>
+        <p:spPr>
+          <a:xfrm>
+            <a:off x="3063240" y="3142615"/>
+            <a:ext cx="112395" cy="76200"/>
+          </a:xfrm>
+          <a:prstGeom prst="rect">
+            <a:avLst/>
+          </a:prstGeom>
+        </p:spPr>
+      </p:pic>
+      <p:pic>
+        <p:nvPicPr>
+          <p:cNvPr id="38" name="334E55B0-647D-440b-865C-3EC943EB4CBC-2" descr="/Users/rifo/Library/Containers/com.kingsoft.wpsoffice.mac/Data/tmp/wpsoffice.ZKQBXPwpsoffice"/>
+          <p:cNvPicPr>
+            <a:picLocks noChangeAspect="1"/>
+          </p:cNvPicPr>
+          <p:nvPr/>
+        </p:nvPicPr>
+        <p:blipFill>
+          <a:blip r:embed="rId4"/>
+          <a:stretch>
+            <a:fillRect/>
+          </a:stretch>
+        </p:blipFill>
+        <p:spPr>
+          <a:xfrm>
+            <a:off x="3225800" y="3447415"/>
+            <a:ext cx="112395" cy="69850"/>
+          </a:xfrm>
+          <a:prstGeom prst="rect">
+            <a:avLst/>
+          </a:prstGeom>
+        </p:spPr>
+      </p:pic>
+      <p:pic>
+        <p:nvPicPr>
+          <p:cNvPr id="67" name="334E55B0-647D-440b-865C-3EC943EB4CBC-3" descr="/Users/rifo/Library/Containers/com.kingsoft.wpsoffice.mac/Data/tmp/wpsoffice.jAByIFwpsoffice"/>
+          <p:cNvPicPr>
+            <a:picLocks noChangeAspect="1"/>
+          </p:cNvPicPr>
+          <p:nvPr/>
+        </p:nvPicPr>
+        <p:blipFill>
+          <a:blip r:embed="rId5"/>
+          <a:stretch>
+            <a:fillRect/>
+          </a:stretch>
+        </p:blipFill>
+        <p:spPr>
+          <a:xfrm>
+            <a:off x="2987040" y="3921125"/>
+            <a:ext cx="112395" cy="68580"/>
+          </a:xfrm>
+          <a:prstGeom prst="rect">
+            <a:avLst/>
+          </a:prstGeom>
+        </p:spPr>
+      </p:pic>
+      <p:sp>
+        <p:nvSpPr>
+          <p:cNvPr id="104" name="Rectangle 28"/>
+          <p:cNvSpPr/>
+          <p:nvPr/>
+        </p:nvSpPr>
+        <p:spPr>
+          <a:xfrm>
+            <a:off x="2865120" y="2760980"/>
+            <a:ext cx="687705" cy="193040"/>
+          </a:xfrm>
+          <a:prstGeom prst="rect">
+            <a:avLst/>
+          </a:prstGeom>
+          <a:noFill/>
+          <a:ln>
+            <a:noFill/>
+          </a:ln>
+          <a:effectLst>
+            <a:reflection stA="0" endPos="65000" dist="50800" dir="5400000" sy="-100000" algn="bl" rotWithShape="0"/>
+          </a:effectLst>
+        </p:spPr>
+        <p:style>
+          <a:lnRef idx="1">
+            <a:schemeClr val="accent1"/>
+          </a:lnRef>
+          <a:fillRef idx="3">
+            <a:schemeClr val="accent1"/>
+          </a:fillRef>
+          <a:effectRef idx="2">
+            <a:schemeClr val="accent1"/>
+          </a:effectRef>
+          <a:fontRef idx="minor">
+            <a:schemeClr val="lt1"/>
+          </a:fontRef>
+        </p:style>
+        <p:txBody>
+          <a:bodyPr vertOverflow="overflow" horzOverflow="overflow" vert="horz" wrap="square" lIns="28800" tIns="14400" rIns="28800" bIns="14400" numCol="1" spcCol="0" rtlCol="0" fromWordArt="0" anchor="t" anchorCtr="0" forceAA="0" compatLnSpc="1">
+            <a:noAutofit/>
+          </a:bodyPr>
+          <a:lstStyle/>
+          <a:p>
+            <a:pPr lvl="0" algn="l">
+              <a:buClrTx/>
+              <a:buSzTx/>
+              <a:buFontTx/>
+            </a:pPr>
+            <a:r>
+              <a:rPr sz="800" b="1">
+                <a:solidFill>
+                  <a:srgbClr val="B06816"/>
+                </a:solidFill>
+                <a:latin typeface="Arial" panose="020B0604020202090204"/>
+                <a:sym typeface="+mn-ea"/>
+              </a:rPr>
+              <a:t>Conformer </a:t>
+            </a:r>
+            <a:br>
+              <a:rPr sz="800" b="1">
+                <a:solidFill>
+                  <a:srgbClr val="B06816"/>
+                </a:solidFill>
+                <a:latin typeface="Arial" panose="020B0604020202090204"/>
+                <a:sym typeface="+mn-ea"/>
+              </a:rPr>
+            </a:br>
+            <a:r>
+              <a:rPr sz="800" b="1">
+                <a:solidFill>
+                  <a:srgbClr val="B06816"/>
+                </a:solidFill>
+                <a:latin typeface="Arial" panose="020B0604020202090204"/>
+                <a:sym typeface="+mn-ea"/>
+              </a:rPr>
+              <a:t>weights</a:t>
+            </a:r>
+            <a:endParaRPr sz="800" b="1">
+              <a:solidFill>
+                <a:srgbClr val="B06816"/>
+              </a:solidFill>
+              <a:latin typeface="Arial" panose="020B0604020202090204"/>
+              <a:sym typeface="+mn-ea"/>
+            </a:endParaRPr>
+          </a:p>
+        </p:txBody>
+      </p:sp>
     </p:spTree>
   </p:cSld>
   <p:clrMapOvr>
@@ -16271,4 +16195,28 @@
     </a:ext>
   </a:extLst>
 </a:theme>
+</file>
+
+<file path=customXml/item1.xml><?xml version="1.0" encoding="utf-8"?>
+<s:customData xmlns="http://www.wps.cn/officeDocument/2013/wpsCustomData" xmlns:s="http://www.wps.cn/officeDocument/2013/wpsCustomData">
+  <extobjs>
+    <extobj name="334E55B0-647D-440b-865C-3EC943EB4CBC-1">
+      <extobjdata type="334E55B0-647D-440b-865C-3EC943EB4CBC" data="ewoJIkltZ1NldHRpbmdKc29uIiA6ICJ7XCJkcGlcIjpcIjYwMFwiLFwiZm9ybWF0XCI6XCJQTkdcIixcInRyYW5zcGFyZW50XCI6dHJ1ZSxcImF1dG9cIjpmYWxzZX0iLAoJIkxhdGV4IiA6ICJYRnNnSUNCY1lXeHdhR0VnWDNzeGZTQWdYRjA9IiwKCSJMYXRleEltZ0Jhc2U2NCIgOiAiaVZCT1J3MEtHZ29BQUFBTlNVaEVVZ0FBQUU0QUFBQXlCQU1BQUFBQVpQQ1VBQUFBTUZCTVZFWC8vLzhBQUFBQUFBQUFBQUFBQUFBQUFBQUFBQUFBQUFBQUFBQUFBQUFBQUFBQUFBQUFBQUFBQUFBQUFBQUFBQUF2M2FCN0FBQUFEM1JTVGxNQUVIYXIzZTltVkxzaXpabUpNa1JscVhZUkFBQUFDWEJJV1hNQUFBN0VBQUFPeEFHVkt3NGJBQUFDWjBsRVFWUTRFZVdWdlc0VFFSREg5d0tPT1JJZkRoSU5UU0pSVVRsQ0FrU0J6bExpMmdqRm9rRGlvRU9pT043QWVZTkxIUWtNaWtSQjQ5UTB1VFlSa3QxUVVOa1BnSFFvMkJBK3hKL1oyNi9aeE00TE1NWGQ3c3h2WjJkbTUvYUUwQkxjYUUwM25wblozSGMxQTFyQXZibUFNbFFUUE53UlY0R241NEpoaGtjUzJNVzNjN2tVSjNVSkJBbjJTL0R5K2l4K0dkRDZMbjZVd09qTkxPN0FibmNSS0IwUDhobmNCY0FzWHdEV0pORWV5K2NwR1FBN1doVUNEMmhZbTU1QzVEUUN2bHQxVWdhNC9Oc3EzS0NuZkNoRkJvbFUvanF6SGZWNWRRZVFXeFp5Y3kzWDlScmFsa1hUS0dQTjFnd2xvdmF4R2xNcDlFak91OEJZaEtvNGNrN25ycTBwOEZOcWxCVEFTN0drMHdoZXYwaXNsemJRTkJSRkpvUHQ2WVV4TUltMVA2b1ljc2VOWktIamZhVzR2WFZyT05JY25RQ0dIcGZYYk5sSmJ6aEtnNlZMYXVTWC9yaDFsbHNGVHBpNlIxemFaQXJqanh5d3NnamlEcWt5VGd6WEJmZ2hFWGZrOWJUaEdzQlh0MXFzQWttVHpXMThCMTc1Sk1mVGQva09YSk5LTjhUeGJCMUgrNjZ6ZmE3NDdoMlhRbjlpQ2laT0g0WmViUExvK1FiaWN1YmUrYXNBMjh3d2wxdnlBZ3I2dm52bmovcUYxZThUbFlXbjVUaVJzZk5Zd0VkVnBqczJGSk9IdU9iNm9OWi9FcFJoTExyV3NGeFZkbm9wWVV3bm00R2F1YUp1R2FtMUhIMDZxaEdpN05kWVVNUFFSeDl2UzZRVXgwVUo3Z3NSUG9mRXhDSW05ZDFwWFVIMGRKeWdhMjFDZCs3allXbE1NY0ZiaTNGT1JCL2FrNzJiMmhZY2RkNDV6T09ZK3N5UTdYdkd4aFgvRzFkNDF3Q3ZoRDl1MkgrTHIrZXpZT1hWRjJyY3U1OVgzSGx6dXhrWEJDbmhWNUN4dW5lQnp0Ym0rODFXQjhmL0FHS0JkOGxxWmV1M0FBQUFBRWxGVGtTdVFtQ0MiCn0K"/>
+    </extobj>
+    <extobj name="334E55B0-647D-440b-865C-3EC943EB4CBC-2">
+      <extobjdata type="334E55B0-647D-440b-865C-3EC943EB4CBC" data="ewoJIkltZ1NldHRpbmdKc29uIiA6ICJ7XCJkcGlcIjpcIjYwMFwiLFwiZm9ybWF0XCI6XCJQTkdcIixcInRyYW5zcGFyZW50XCI6dHJ1ZSxcImF1dG9cIjpmYWxzZX0iLAoJIkxhdGV4IiA6ICJYRnNnSUNCY1lXeHdhR0VnWDNzeWZTQWdYRjA9IiwKCSJMYXRleEltZ0Jhc2U2NCIgOiAiaVZCT1J3MEtHZ29BQUFBTlNVaEVVZ0FBQUZBQUFBQXlCQU1BQUFBNUEwSFBBQUFBTUZCTVZFWC8vLzhBQUFBQUFBQUFBQUFBQUFBQUFBQUFBQUFBQUFBQUFBQUFBQUFBQUFBQUFBQUFBQUFBQUFBQUFBQUFBQUF2M2FCN0FBQUFEM1JTVGxNQUVIYXIzZTltVkxzaXpabUpNa1JscVhZUkFBQUFDWEJJV1hNQUFBN0VBQUFPeEFHVkt3NGJBQUFDMEVsRVFWUklEWDFVUFc4VFFSQmRtK1FTNThPSmtHaEpKQ29hTGhVU0JYSWtsSUxLRVZKRWdlQk1SK2Y4QTRkZmNDNGhqVUZJVkVoT0c1cVlrZ2pKYWFoelB3QXBDVGxEQ0IrUE56dnJ1M1ZrM3hSN3N6TnZaMmJmeksweFRrcTNOZ1lQbmc5M2s3OHpNYkFCM0p1TVVNOU1oRWR0Y3gxb0ZDTXJNUjRMWWhmbnhjQW1McFlGVVlxd1o1RnphMk1QTEFETzBjSlBpemgrTXhaNGtHV2NBbXpvZm04YzhCb3dERkFHVmdWU1QyUzlLbjJnN1d3VllKUHE0dUFxUnZaVjRFZG1qMnlSQzc4emc2ZDBOSXBhWWdobStwL256OVN1VDNNZmt2VkU4b3RVUDBicGg4U3FrdG1yS0xUMXhxdnFDeUpRQnAvc2pveDhWN09zTFNBeEZlWElWT3JwbmRmZjZpNWpFL2lWQTArQWJUUHY3bktjSHRGRHlteGplV0I5Qk5nd0hUMVppVjVheDdGdEhKbERMd2ZTdUdwcWU5WXdkNmwyNVkrQklRbWNFTmhiZFB5M3pweXhKbzNsWGJ4TEd3SE8vbEZBcklHTjZVaWFGZUJpR0k1ZjJuck5kV3NvWWRDemlwbVRhekNFeDQ0QVA1TWdrY1hNd3pFOEUrTDhmaEY0NkthY2QzQzNDWVRCRURpMUFYUlpBYUoxVmNtSEsycEdnaDJNMENnbFp5VFUzYmdiUnZ4cit2blVTaUFDM1oyTmVaVTJORFlwdEtuWGRHdlhwZEVFNnBtVlFXekMvWGhxSTNESVhuN2NHanVqSHRwNk9jSnBvY3plTkxEamVjWUNJeG43K1pHaVN0M1JCRFlFTDcxcE9LUStqMS9Kam44M0MreGcwS1lTZTUwcDQ0dXlkZGVyeG5USkl1WEdrSDkydC91c1pDc0ovRGxoY1lrQTJaOXQrYktLR3JzY2sxc3pyUytRbWtNOFZhWGxjbGZqeTBUbWpLOUJiVWRkc2daSWwzVlhqWENmNFY1QWNOYStPM0F1QVRSeitqaHVLWi9sSjBkaXB5UEZXNnZaSmNoN0wrOUJQWDEzMnpsTGgxdnZjeHpQSmQ1dXNocmc0V1NuN3duMXpRNzJmZU1ZdmV6Nk5FWE9DaVYwVTd4MFdnampzOU5Rd0lUSFB6c2REbi9RL2xwbUc2ZVU3ZFRRYzVNdlJaR0UyQktKT0h0SkVZNGR5NlJkQk94bk1LQUl4N2NuazdRSXlFSE41Tno4QnpXd3BLaTkyakswQUFBQUFFbEZUa1N1UW1DQyIKfQo="/>
+    </extobj>
+    <extobj name="334E55B0-647D-440b-865C-3EC943EB4CBC-3">
+      <extobjdata type="334E55B0-647D-440b-865C-3EC943EB4CBC" data="ewoJIkltZ1NldHRpbmdKc29uIiA6ICJ7XCJkcGlcIjpcIjYwMFwiLFwiZm9ybWF0XCI6XCJQTkdcIixcInRyYW5zcGFyZW50XCI6dHJ1ZSxcImF1dG9cIjpmYWxzZX0iLAoJIkxhdGV4IiA6ICJYRnNnSUNCY1lXeHdhR0VnWDN0cmZTQWdYRjA9IiwKCSJMYXRleEltZ0Jhc2U2NCIgOiAiaVZCT1J3MEtHZ29BQUFBTlNVaEVVZ0FBQUZNQUFBQXpCQU1BQUFBWmFDbHBBQUFBTUZCTVZFWC8vLzhBQUFBQUFBQUFBQUFBQUFBQUFBQUFBQUFBQUFBQUFBQUFBQUFBQUFBQUFBQUFBQUFBQUFBQUFBQUFBQUF2M2FCN0FBQUFEM1JTVGxNQUVIYXIzZTltVkxzaXpabUpNa1JscVhZUkFBQUFDWEJJV1hNQUFBN0VBQUFPeEFHVkt3NGJBQUFESTBsRVFWUklEWVZWUFc4VFFSQ2RTMkxIVHVJUGdaQVFqUzFSVVNWSUNJa0MyVkpJaDNBVUthSkFjSUVxRFhKS09vZUNob0pMa1NwTlFFaTBUazFqdHdRa3A0RGEvZ2NPNUFLSitYak03Tzd0cldXZnM4WGV6c3piMlprM3MzdEVabmpYVjA2WG4wYlNwTzlzQUt3QWR5Wmh0RzNXeDlvT1hRSTJMc0ptQXp3VXpCNU9Mb0xXY1ZZVWpPZmpRR0hubGhLMkxBREcxTUF2aGVtK1RZQzI3TGt6Z0hMZmFZK0hUZ09Sa3ltZ0xLQmFUK2JSMFFGMmpEWUxyUEl5ZHpxS0VrMGUrR2t0dmdwMjRiZFdaSjk5Zm4zdnlCcHBYM3ZTaWdDQ1N2M1RFcHNBQjlwMGllOUF6dTVMRkR5dWNnR2hsekx6K1U1a2l5cnVvQnpaU3hoRVN5TG01MGNzTllBZVpUVmpvaTNoVDJ5c0ErZXgxQWUyYU41a3hlbytUTmdDcVFGVitlckIwQTNhai9kMmNCeVorRENnYlNYcVNnMHFCMWJSdE5VaDR2cTRkREMwbmJNVklYTDljRllPQWVLMW5Za3pZWHA2OW9RU2NHWUZrbnEwNjFXcjRKNHJXb0hkT0Z3SjlKUGpLSVBRSXFrQmx3NkJIam8zb2FEcWJOQ0xjT2dReXVGWFkwZGQwK3BLMHhxaVZhQXVJWXY0SHUvcnhIMHRTb2JHK1JNRnVqejVXNE0yRVFld0ZHK2t3dkFoVU5jeTF3eGZjZGZVdFJTaEdScVhpbkxTRWV4dWpZdGFscFFkbTNqbG82TEJwU3dTWlU2SzFPRUNwNER0eU1MZlllaTBWTkpybG1sVzRwb2ZDczVyRGgyU2tsdS95MjA0TFE2NXM0NWpyOStZcTZWWTNPY0xtdk43SkE2UGhJKzRlYWZ3UlhOM1c4UHJPS2YrWTE1N3dRT2VyOFR0a21zKzhWUThhZE5CRmF5bXd4MjlqV2VPZUVzTDJRcEhGckFqU3VtWGkzemNyTHkwU09LRzBSSGtnMEZQdXBEZmo4cTJzbk1lTmJkMmxQZHhseWk3Q1VGU0dtRng3N1Nvb0dsTzh2NXp0VFFUOTIvSWI4TWp6cEZISFNIZWFRdm56Y1BvdFNyL3NSYSt2NkhYNUIydWZ6RExHWnhsWDhCdFdXTVkvWlRrZ2x3ZUx1Y29TbWthK012Zmx0dmVDVWdHSGJPcFlOLzBKQnpyYTZxVDV0UUw5N1UzQVVoY3VUTGI1MVE1S3hPaFhFZmhMNlVvOEhtVlBKaHZNUmFFaDd4ejQ4ZnMwQ2N6bERzaUkxd2tEK1ZPM21xR2RhdkpPTGFZWjNoQnZDYjl5SXdEOHd4Ny9vQ2N4M0dzOTVhNXZMdFk5Zy9HSXF6eVdwVDE1dm9iVnY0SFlPbWsvaUhHOUtrQUFBQUFTVVZPUks1Q1lJST0iCn0K"/>
+    </extobj>
+  </extobjs>
+</s:customData>
+</file>
+
+<file path=customXml/itemProps1.xml><?xml version="1.0" encoding="utf-8"?>
+<ds:datastoreItem xmlns:ds="http://schemas.openxmlformats.org/officeDocument/2006/customXml" ds:itemID="s:customData">
+  <ds:schemaRefs>
+    <ds:schemaRef ds:uri="http://www.wps.cn/officeDocument/2013/wpsCustomData"/>
+  </ds:schemaRefs>
+</ds:datastoreItem>
 </file>